--- a/presentations/modern Approaches in JS Development 2026.pptx
+++ b/presentations/modern Approaches in JS Development 2026.pptx
@@ -4932,7 +4932,7 @@
         <p:spPr>
           <a:xfrm>
             <a:off x="457200" y="2880360"/>
-            <a:ext cx="8229600" cy="1691640"/>
+            <a:ext cx="8229600" cy="1779640"/>
           </a:xfrm>
           <a:prstGeom prst="roundRect">
             <a:avLst>
@@ -4961,16 +4961,18 @@
         <p:spPr>
           <a:xfrm>
             <a:off x="685800" y="3035808"/>
-            <a:ext cx="7772400" cy="1417320"/>
-          </a:xfrm>
-          <a:prstGeom prst="rect">
-            <a:avLst/>
-          </a:prstGeom>
-          <a:noFill/>
-          <a:ln/>
-        </p:spPr>
-        <p:txBody>
-          <a:bodyPr wrap="square" lIns="0" tIns="0" rIns="0" bIns="0" rtlCol="0" anchor="t"/>
+            <a:ext cx="7772400" cy="1532752"/>
+          </a:xfrm>
+          <a:prstGeom prst="rect">
+            <a:avLst/>
+          </a:prstGeom>
+          <a:noFill/>
+          <a:ln/>
+        </p:spPr>
+        <p:txBody>
+          <a:bodyPr wrap="square" lIns="0" tIns="0" rIns="0" bIns="0" rtlCol="0" anchor="t">
+            <a:normAutofit/>
+          </a:bodyPr>
           <a:lstStyle/>
           <a:p>
             <a:pPr indent="0" marL="0">
@@ -6575,7 +6577,7 @@
         <p:spPr>
           <a:xfrm>
             <a:off x="457200" y="3703320"/>
-            <a:ext cx="8229600" cy="1005840"/>
+            <a:ext cx="8229600" cy="1006680"/>
           </a:xfrm>
           <a:prstGeom prst="roundRect">
             <a:avLst>
@@ -6604,16 +6606,18 @@
         <p:spPr>
           <a:xfrm>
             <a:off x="685800" y="3840480"/>
-            <a:ext cx="7772400" cy="731520"/>
-          </a:xfrm>
-          <a:prstGeom prst="rect">
-            <a:avLst/>
-          </a:prstGeom>
-          <a:noFill/>
-          <a:ln/>
-        </p:spPr>
-        <p:txBody>
-          <a:bodyPr wrap="square" lIns="0" tIns="0" rIns="0" bIns="0" rtlCol="0" anchor="ctr"/>
+            <a:ext cx="7772400" cy="813800"/>
+          </a:xfrm>
+          <a:prstGeom prst="rect">
+            <a:avLst/>
+          </a:prstGeom>
+          <a:noFill/>
+          <a:ln/>
+        </p:spPr>
+        <p:txBody>
+          <a:bodyPr wrap="square" lIns="0" tIns="0" rIns="0" bIns="0" rtlCol="0" anchor="ctr">
+            <a:normAutofit/>
+          </a:bodyPr>
           <a:lstStyle/>
           <a:p>
             <a:pPr indent="0" marL="0">
@@ -6791,7 +6795,7 @@
                 <a:ea typeface="Arial" pitchFamily="34" charset="-122"/>
                 <a:cs typeface="Arial" pitchFamily="34" charset="-120"/>
               </a:rPr>
-              <a:t>A module executes only on the first access to its namespace</a:t>
+              <a:t>A module executes only on the first access to its namespace — Stage 4, targeting ES2027</a:t>
             </a:r>
             <a:endParaRPr lang="en-US" sz="1300" dirty="0"/>
           </a:p>
@@ -7253,7 +7257,7 @@
                 <a:ea typeface="Arial" pitchFamily="34" charset="-122"/>
                 <a:cs typeface="Arial" pitchFamily="34" charset="-120"/>
               </a:rPr>
-              <a:t>Module harmony: </a:t>
+              <a:t>Note: import defer reached Stage 4 in March 2026 but missed the ES2026 snapshot — it targets ES2027. Browser implementations are landing now (Firefox ships it; Chrome in progress).</a:t>
             </a:r>
             <a:pPr indent="0" marL="0">
               <a:buNone/>
@@ -8332,7 +8336,7 @@
                 <a:ea typeface="Arial" pitchFamily="34" charset="-122"/>
                 <a:cs typeface="Arial" pitchFamily="34" charset="-120"/>
               </a:rPr>
-              <a:t>84M</a:t>
+              <a:t>130M+</a:t>
             </a:r>
             <a:endParaRPr lang="en-US" sz="3000" dirty="0"/>
           </a:p>
@@ -8371,7 +8375,7 @@
                 <a:ea typeface="Arial" pitchFamily="34" charset="-122"/>
                 <a:cs typeface="Arial" pitchFamily="34" charset="-120"/>
               </a:rPr>
-              <a:t>weekly npm downloads</a:t>
+              <a:t>weekly downloads (post Cloudflare acquisition, June 2026)</a:t>
             </a:r>
             <a:endParaRPr lang="en-US" sz="1050" dirty="0"/>
           </a:p>
@@ -8600,7 +8604,7 @@
         <p:spPr>
           <a:xfrm>
             <a:off x="457200" y="2697480"/>
-            <a:ext cx="8229600" cy="1920240"/>
+            <a:ext cx="8229600" cy="2012520"/>
           </a:xfrm>
           <a:prstGeom prst="roundRect">
             <a:avLst>
@@ -8629,16 +8633,18 @@
         <p:spPr>
           <a:xfrm>
             <a:off x="685800" y="2852928"/>
-            <a:ext cx="7772400" cy="1645920"/>
-          </a:xfrm>
-          <a:prstGeom prst="rect">
-            <a:avLst/>
-          </a:prstGeom>
-          <a:noFill/>
-          <a:ln/>
-        </p:spPr>
-        <p:txBody>
-          <a:bodyPr wrap="square" lIns="0" tIns="0" rIns="0" bIns="0" rtlCol="0" anchor="t"/>
+            <a:ext cx="7772400" cy="1801352"/>
+          </a:xfrm>
+          <a:prstGeom prst="rect">
+            <a:avLst/>
+          </a:prstGeom>
+          <a:noFill/>
+          <a:ln/>
+        </p:spPr>
+        <p:txBody>
+          <a:bodyPr wrap="square" lIns="0" tIns="0" rIns="0" bIns="0" rtlCol="0" anchor="t">
+            <a:normAutofit/>
+          </a:bodyPr>
           <a:lstStyle/>
           <a:p>
             <a:pPr indent="0" marL="0">
@@ -11051,7 +11057,7 @@
                 <a:ea typeface="Arial" pitchFamily="34" charset="-122"/>
                 <a:cs typeface="Arial" pitchFamily="34" charset="-120"/>
               </a:rPr>
-              <a:t>AI in Development</a:t>
+              <a:t>AI &amp; Security</a:t>
             </a:r>
             <a:endParaRPr lang="en-US" sz="1500" dirty="0"/>
           </a:p>
@@ -11090,7 +11096,7 @@
                 <a:ea typeface="Arial" pitchFamily="34" charset="-122"/>
                 <a:cs typeface="Arial" pitchFamily="34" charset="-120"/>
               </a:rPr>
-              <a:t>Assistants now write nearly half of new code</a:t>
+              <a:t>46% AI-generated code; npm supply chain attacks</a:t>
             </a:r>
             <a:endParaRPr lang="en-US" sz="1050" dirty="0"/>
           </a:p>
@@ -11241,7 +11247,7 @@
                 <a:ea typeface="Arial" pitchFamily="34" charset="-122"/>
                 <a:cs typeface="Arial" pitchFamily="34" charset="-120"/>
               </a:rPr>
-              <a:t>Security</a:t>
+              <a:t>Conclusions</a:t>
             </a:r>
             <a:endParaRPr lang="en-US" sz="1500" dirty="0"/>
           </a:p>
@@ -11280,7 +11286,7 @@
                 <a:ea typeface="Arial" pitchFamily="34" charset="-122"/>
                 <a:cs typeface="Arial" pitchFamily="34" charset="-120"/>
               </a:rPr>
-              <a:t>Supply chain attacks and takeaways for us</a:t>
+              <a:t>Adopt, Trial, Watch — decisions for next quarter</a:t>
             </a:r>
             <a:endParaRPr lang="en-US" sz="1050" dirty="0"/>
           </a:p>
@@ -14956,7 +14962,7 @@
         <p:spPr>
           <a:xfrm>
             <a:off x="457200" y="2743200"/>
-            <a:ext cx="8229600" cy="1874520"/>
+            <a:ext cx="8229600" cy="1966800"/>
           </a:xfrm>
           <a:prstGeom prst="roundRect">
             <a:avLst>
@@ -14985,16 +14991,18 @@
         <p:spPr>
           <a:xfrm>
             <a:off x="685800" y="2898648"/>
-            <a:ext cx="7772400" cy="1600200"/>
-          </a:xfrm>
-          <a:prstGeom prst="rect">
-            <a:avLst/>
-          </a:prstGeom>
-          <a:noFill/>
-          <a:ln/>
-        </p:spPr>
-        <p:txBody>
-          <a:bodyPr wrap="square" lIns="0" tIns="0" rIns="0" bIns="0" rtlCol="0" anchor="t"/>
+            <a:ext cx="7772400" cy="1755632"/>
+          </a:xfrm>
+          <a:prstGeom prst="rect">
+            <a:avLst/>
+          </a:prstGeom>
+          <a:noFill/>
+          <a:ln/>
+        </p:spPr>
+        <p:txBody>
+          <a:bodyPr wrap="square" lIns="0" tIns="0" rIns="0" bIns="0" rtlCol="0" anchor="t">
+            <a:normAutofit/>
+          </a:bodyPr>
           <a:lstStyle/>
           <a:p>
             <a:pPr indent="0" marL="0">
@@ -17263,6 +17271,45 @@
             <a:endParaRPr lang="en-US" sz="1000" dirty="0"/>
           </a:p>
         </p:txBody>
+      </p:sp>
+      <p:sp>
+        <p:nvSpPr>
+          <p:cNvPr id="23" name="TextBox 22"/>
+          <p:cNvSpPr txBox="1"/>
+          <p:nvPr/>
+        </p:nvSpPr>
+        <p:spPr>
+          <a:xfrm>
+            <a:off x="457200" y="820000"/>
+            <a:ext cx="8229600" cy="200000"/>
+          </a:xfrm>
+          <a:prstGeom prst="rect">
+            <a:avLst/>
+          </a:prstGeom>
+          <a:noFill/>
+        </p:spPr>
+        <p:txBody>
+          <a:bodyPr wrap="square">
+            <a:spAutoFit/>
+          </a:bodyPr>
+          <a:lstStyle/>
+          <a:p>
+            <a:pPr algn="ctr"/>
+            <a:r>
+              <a:rPr sz="1300" i="1">
+                <a:solidFill>
+                  <a:srgbClr val="999999"/>
+                </a:solidFill>
+              </a:rPr>
+              <a:t>The foundations changed — not just the libraries on top of them</a:t>
+            </a:r>
+          </a:p>
+        </p:txBody>
+        <a:spPr>
+          <a:ln>
+            <a:noFill/>
+          </a:ln>
+        </a:spPr>
       </p:sp>
     </p:spTree>
   </p:cSld>
